--- a/Slides/CSC6032/Advanced-OS-00-Syllabus.pptx
+++ b/Slides/CSC6032/Advanced-OS-00-Syllabus.pptx
@@ -226,7 +226,7 @@
             <a:fld id="{45BDCE37-E9BE-4280-8D68-34E43D66CEDB}" type="datetimeFigureOut">
               <a:rPr lang="zh-TW" altLang="en-US" smtClean="0"/>
               <a:pPr/>
-              <a:t>2024/8/15</a:t>
+              <a:t>2026/9/28</a:t>
             </a:fld>
             <a:endParaRPr lang="zh-TW" altLang="en-US"/>
           </a:p>
@@ -393,7 +393,7 @@
             <a:fld id="{FBFBA883-381C-409E-9635-BB54B21745E4}" type="datetimeFigureOut">
               <a:rPr lang="zh-TW" altLang="en-US" smtClean="0"/>
               <a:pPr/>
-              <a:t>2024/8/15</a:t>
+              <a:t>2026/9/28</a:t>
             </a:fld>
             <a:endParaRPr lang="zh-TW" altLang="en-US"/>
           </a:p>
@@ -3312,9 +3312,9 @@
           <a:solidFill>
             <a:schemeClr val="tx2"/>
           </a:solidFill>
-          <a:latin typeface="Calibri" pitchFamily="34" charset="0"/>
+          <a:latin typeface="Times New Roman" panose="02020603050405020304" pitchFamily="18" charset="0"/>
           <a:ea typeface="標楷體" pitchFamily="65" charset="-120"/>
-          <a:cs typeface="+mj-cs"/>
+          <a:cs typeface="Times New Roman" panose="02020603050405020304" pitchFamily="18" charset="0"/>
         </a:defRPr>
       </a:lvl1pPr>
       <a:lvl2pPr algn="l" rtl="0" eaLnBrk="1" fontAlgn="base" hangingPunct="1">
@@ -3464,9 +3464,9 @@
           <a:solidFill>
             <a:schemeClr val="tx1"/>
           </a:solidFill>
-          <a:latin typeface="Calibri" pitchFamily="34" charset="0"/>
+          <a:latin typeface="Times New Roman" panose="02020603050405020304" pitchFamily="18" charset="0"/>
           <a:ea typeface="標楷體" pitchFamily="65" charset="-120"/>
-          <a:cs typeface="+mn-cs"/>
+          <a:cs typeface="Times New Roman" panose="02020603050405020304" pitchFamily="18" charset="0"/>
         </a:defRPr>
       </a:lvl1pPr>
       <a:lvl2pPr marL="557199" indent="-214308" algn="l" rtl="0" eaLnBrk="1" fontAlgn="base" hangingPunct="1">
@@ -3486,8 +3486,9 @@
           <a:solidFill>
             <a:schemeClr val="tx1"/>
           </a:solidFill>
-          <a:latin typeface="Calibri" pitchFamily="34" charset="0"/>
+          <a:latin typeface="Times New Roman" panose="02020603050405020304" pitchFamily="18" charset="0"/>
           <a:ea typeface="標楷體" pitchFamily="65" charset="-120"/>
+          <a:cs typeface="Times New Roman" panose="02020603050405020304" pitchFamily="18" charset="0"/>
         </a:defRPr>
       </a:lvl2pPr>
       <a:lvl3pPr marL="857229" indent="-171446" algn="l" rtl="0" eaLnBrk="1" fontAlgn="base" hangingPunct="1">
@@ -3990,7 +3991,7 @@
                 <a:latin typeface="楷体" panose="02010609060101010101" pitchFamily="49" charset="-122"/>
                 <a:ea typeface="楷体" panose="02010609060101010101" pitchFamily="49" charset="-122"/>
               </a:rPr>
-              <a:t>洪世豪</a:t>
+              <a:t>汪梁森</a:t>
             </a:r>
             <a:r>
               <a:rPr lang="zh-CN" altLang="en-US" dirty="0">
@@ -4002,9 +4003,17 @@
               <a:rPr lang="en-US" altLang="zh-CN" dirty="0">
                 <a:effectLst/>
               </a:rPr>
-              <a:t>: shihaohong@link.cuhk.edu.cn</a:t>
-            </a:r>
-            <a:endParaRPr lang="en-US" altLang="zh-CN" dirty="0"/>
+              <a:t>: </a:t>
+            </a:r>
+            <a:r>
+              <a:rPr lang="de-DE" altLang="zh-CN" dirty="0">
+                <a:hlinkClick r:id="rId2"/>
+              </a:rPr>
+              <a:t>liangsenwang@link.cuhk.edu.cn</a:t>
+            </a:r>
+            <a:endParaRPr lang="en-US" altLang="zh-CN" dirty="0">
+              <a:effectLst/>
+            </a:endParaRPr>
           </a:p>
           <a:p>
             <a:r>
@@ -4174,7 +4183,7 @@
                     <a:lumMod val="10000"/>
                   </a:schemeClr>
                 </a:solidFill>
-                <a:hlinkClick r:id="rId2"/>
+                <a:hlinkClick r:id="rId3"/>
               </a:rPr>
               <a:t>https://bb.cuhk.edu.cn</a:t>
             </a:r>
@@ -4210,9 +4219,9 @@
                     <a:lumMod val="10000"/>
                   </a:schemeClr>
                 </a:solidFill>
-                <a:hlinkClick r:id="rId3"/>
-              </a:rPr>
-              <a:t>http://www.cs.nthu.edu.tw/~ychung/syllabus/CSC6032-2024-Fall.htm</a:t>
+                <a:hlinkClick r:id="rId4"/>
+              </a:rPr>
+              <a:t>http://mypage.cuhk.edu.cn/ychung/syllabus/CSC6032-2027-Spring.htm</a:t>
             </a:r>
             <a:endParaRPr lang="en-US" altLang="zh-CN" dirty="0">
               <a:solidFill>
@@ -4496,80 +4505,52 @@
         </p:nvSpPr>
         <p:spPr>
           <a:xfrm>
-            <a:off x="1064126" y="822251"/>
-            <a:ext cx="7367776" cy="2568312"/>
+            <a:off x="1056034" y="903171"/>
+            <a:ext cx="7367776" cy="3466528"/>
           </a:xfrm>
         </p:spPr>
         <p:txBody>
           <a:bodyPr>
-            <a:normAutofit/>
+            <a:noAutofit/>
           </a:bodyPr>
           <a:lstStyle/>
           <a:p>
             <a:r>
-              <a:rPr lang="en-US" sz="2400" dirty="0">
+              <a:rPr lang="en-US" altLang="zh-CN" sz="2000" dirty="0">
                 <a:solidFill>
                   <a:schemeClr val="bg2">
                     <a:lumMod val="10000"/>
                   </a:schemeClr>
                 </a:solidFill>
               </a:rPr>
-              <a:t>Textbooks</a:t>
+              <a:t>Textbook</a:t>
             </a:r>
           </a:p>
           <a:p>
             <a:pPr lvl="1"/>
             <a:r>
-              <a:rPr lang="en-US" sz="2200" dirty="0" err="1">
+              <a:rPr lang="en-US" altLang="zh-CN" sz="2000" dirty="0">
                 <a:solidFill>
                   <a:schemeClr val="bg2">
                     <a:lumMod val="10000"/>
                   </a:schemeClr>
                 </a:solidFill>
-                <a:cs typeface="Calibri" panose="020F0502020204030204" pitchFamily="34" charset="0"/>
-              </a:rPr>
-              <a:t>Distribute_OS</a:t>
-            </a:r>
-            <a:r>
-              <a:rPr lang="en-US" sz="2200" dirty="0">
-                <a:solidFill>
-                  <a:schemeClr val="bg2">
-                    <a:lumMod val="10000"/>
-                  </a:schemeClr>
-                </a:solidFill>
-                <a:cs typeface="Calibri" panose="020F0502020204030204" pitchFamily="34" charset="0"/>
-              </a:rPr>
-              <a:t> by Tanenbaum</a:t>
-            </a:r>
-          </a:p>
-          <a:p>
-            <a:pPr lvl="1"/>
-            <a:r>
-              <a:rPr lang="en-US" sz="2200" dirty="0">
-                <a:solidFill>
-                  <a:schemeClr val="bg2">
-                    <a:lumMod val="10000"/>
-                  </a:schemeClr>
-                </a:solidFill>
-                <a:cs typeface="Calibri" panose="020F0502020204030204" pitchFamily="34" charset="0"/>
               </a:rPr>
               <a:t>Virtualization-From Desktop to Enterprise by </a:t>
             </a:r>
             <a:r>
-              <a:rPr lang="en-US" altLang="zh-CN" sz="2200" b="0" i="0" u="none" strike="noStrike" baseline="0" dirty="0">
+              <a:rPr lang="en-US" altLang="zh-CN" sz="2000" b="0" i="0" u="none" strike="noStrike" baseline="0" dirty="0">
                 <a:solidFill>
                   <a:srgbClr val="060505"/>
                 </a:solidFill>
-                <a:cs typeface="Calibri" panose="020F0502020204030204" pitchFamily="34" charset="0"/>
               </a:rPr>
               <a:t>Chris Wolf and Erick M. Halter</a:t>
             </a:r>
           </a:p>
           <a:p>
             <a:r>
-              <a:rPr lang="en-US" altLang="zh-CN" sz="2400" dirty="0">
+              <a:rPr lang="en-US" altLang="zh-CN" sz="2000" dirty="0">
                 <a:ea typeface="楷体" panose="02010609060101010101" pitchFamily="49" charset="-122"/>
-                <a:cs typeface="Calibri" panose="020F0502020204030204" pitchFamily="34" charset="0"/>
               </a:rPr>
               <a:t>References</a:t>
             </a:r>
@@ -4577,16 +4558,30 @@
           <a:p>
             <a:pPr lvl="1"/>
             <a:r>
-              <a:rPr lang="en-US" altLang="zh-CN" sz="2200" dirty="0">
-                <a:solidFill>
-                  <a:schemeClr val="bg2">
-                    <a:lumMod val="10000"/>
-                  </a:schemeClr>
-                </a:solidFill>
-                <a:cs typeface="Calibri" panose="020F0502020204030204" pitchFamily="34" charset="0"/>
-              </a:rPr>
-              <a:t>Papers</a:t>
-            </a:r>
+              <a:rPr lang="zh-CN" altLang="zh-CN" sz="2000" dirty="0"/>
+              <a:t>Matthew Portnoy, Virtualization Essential, Third Edition, John Wiley &amp; Sons, 2023</a:t>
+            </a:r>
+            <a:endParaRPr lang="en-US" altLang="zh-CN" sz="2000" dirty="0"/>
+          </a:p>
+          <a:p>
+            <a:pPr lvl="1"/>
+            <a:r>
+              <a:rPr lang="zh-CN" altLang="zh-CN" sz="2000" dirty="0"/>
+              <a:t>Mitch Tulloch, Understanding Microsoft Virtualization Solutions, Microsoft Press, 2010</a:t>
+            </a:r>
+            <a:endParaRPr lang="en-US" altLang="zh-CN" sz="2000" dirty="0"/>
+          </a:p>
+          <a:p>
+            <a:pPr lvl="1"/>
+            <a:r>
+              <a:rPr lang="en-US" altLang="zh-CN" sz="2000" dirty="0"/>
+              <a:t>Shashank Mohan Jain, Linux Containers and Virtualization: Utilizing Rust for Linux Containers, </a:t>
+            </a:r>
+            <a:r>
+              <a:rPr lang="zh-CN" altLang="zh-CN" sz="2000" dirty="0"/>
+              <a:t>APress 2023</a:t>
+            </a:r>
+            <a:endParaRPr lang="en-US" altLang="zh-CN" sz="2000" dirty="0"/>
           </a:p>
         </p:txBody>
       </p:sp>
